--- a/material/Sesion-09-Blockchain-Web3.pptx
+++ b/material/Sesion-09-Blockchain-Web3.pptx
@@ -1857,7 +1857,7 @@
           <a:p>
             <a:r>
               <a:rPr lang="en-US" dirty="0"/>
-              <a:t>⚠ Salida REAL: se corrió slither 0.11.6 (con solc-select 0.8.28) sobre contracts/s09/BancoVulnerable.sol y marcó reentrancy-eth (ALTA) + low-level-calls (informativa): '2 result(s) found'. Sobre BancoSeguro (con --filter-paths node_modules) solo queda low-level-calls informativa: la corrección desaparece el hallazgo alto. Si la sala no permite Python, hay extensiones de VS Code. Correrlo en vivo si hay tiempo.</a:t>
+              <a:t>⚠ Salida REAL: se corrió slither 0.11.6 sobre contracts/s09/BancoVulnerable.sol y marcó reentrancy-eth (ALTA) + low-level-calls (informativa): '2 result(s) found'. Sobre BancoSeguro (con --filter-paths node_modules) solo queda low-level-calls informativa: la corrección desaparece el hallazgo alto. Esa corrida fue con solc-select 0.8.28, cuando el curso estaba fijado en esa versión; los contratos ahora fijan 0.8.34, así que hay que hacer 'solc-select install 0.8.34 &amp;&amp; solc-select use 0.8.34' o slither falla con el pragma. ⚠ VERIFICAR ANTES DE DICTAR: la corrida no se repitió con 0.8.34 (los detectores no dependen de la versión de parche, pero el conteo '2 result(s) found' y el número de detectores sí pueden cambiar con la versión de slither). Si la sala no permite Python, hay extensiones de VS Code. Correrlo en vivo si hay tiempo.</a:t>
             </a:r>
             <a:endParaRPr lang="en-US" dirty="0"/>
           </a:p>

--- a/material/Sesion-09-Blockchain-Web3.pptx
+++ b/material/Sesion-09-Blockchain-Web3.pptx
@@ -1857,7 +1857,7 @@
           <a:p>
             <a:r>
               <a:rPr lang="en-US" dirty="0"/>
-              <a:t>⚠ Salida REAL: se corrió slither 0.11.6 sobre contracts/s09/BancoVulnerable.sol y marcó reentrancy-eth (ALTA) + low-level-calls (informativa): '2 result(s) found'. Sobre BancoSeguro (con --filter-paths node_modules) solo queda low-level-calls informativa: la corrección desaparece el hallazgo alto. Esa corrida fue con solc-select 0.8.28, cuando el curso estaba fijado en esa versión; los contratos ahora fijan 0.8.34, así que hay que hacer 'solc-select install 0.8.34 &amp;&amp; solc-select use 0.8.34' o slither falla con el pragma. ⚠ VERIFICAR ANTES DE DICTAR: la corrida no se repitió con 0.8.34 (los detectores no dependen de la versión de parche, pero el conteo '2 result(s) found' y el número de detectores sí pueden cambiar con la versión de slither). Si la sala no permite Python, hay extensiones de VS Code. Correrlo en vivo si hay tiempo.</a:t>
+              <a:t>Salida REAL, verificada el 21-oct-2026 con slither 0.11.6 y solc 0.8.34, la versión congelada del curso: sobre BancoVulnerable marca reentrancy-eth (ALTA) + low-level-calls (informativa) y cierra con '2 result(s) found'. Sobre BancoSeguro queda '1 result(s) found': solo la informativa, porque la corrección hace desaparecer el hallazgo alto. Ese antes y después es lo que conviene proyectar. Dos trampas comprobadas al correrlo: (1) hay que fijar el compilador con 'solc-select install 0.8.34 &amp;&amp; solc-select use 0.8.34', o slither falla con el pragma; (2) si el contrato importa OpenZeppelin —como BancoSeguro— hay que decirle dónde buscar: 'slither contracts/s09/BancoSeguro.sol --solc-remaps "@openzeppelin=node_modules/@openzeppelin"', si no, se cae con 'Source not found'. Si la sala no permite Python, hay extensiones de VS Code. Correrlo en vivo si hay tiempo.</a:t>
             </a:r>
             <a:endParaRPr lang="en-US" dirty="0"/>
           </a:p>
